--- a/decks/geog-climate-change/geog-climate-change_ch3_effects.pptx
+++ b/decks/geog-climate-change/geog-climate-change_ch3_effects.pptx
@@ -126,30 +126,30 @@
   <p:extLst>
     <p:ext uri="{521415D9-36F7-43E2-AB2F-B90AF26B5E84}">
       <p14:sectionLst xmlns:p14="http://schemas.microsoft.com/office/powerpoint/2010/main">
-        <p14:section name="Opening" id="{de0c9c44-511c-71ee-fb1e-97eff51b5435}">
+        <p14:section name="Opening" id="{c9bea113-42ea-8a80-fd0e-dd22f9ae587d}">
           <p14:sldIdLst>
             <p14:sldId id="256"/>
           </p14:sldIdLst>
         </p14:section>
-        <p14:section name="Gate" id="{b3fcc9ae-e38c-cca1-1e8d-790301049ae2}">
+        <p14:section name="Gate" id="{732b0ac6-e6d8-4305-3104-9df9439c4fa2}">
           <p14:sldIdLst>
             <p14:sldId id="257"/>
             <p14:sldId id="258"/>
           </p14:sldIdLst>
         </p14:section>
-        <p14:section name="Pre-teach" id="{f0862927-0c39-54a8-e9e1-33f8e8b1dce0}">
+        <p14:section name="Pre-teach" id="{2292cdc3-6cba-1669-4b42-a118431e24e5}">
           <p14:sldIdLst>
             <p14:sldId id="259"/>
             <p14:sldId id="260"/>
           </p14:sldIdLst>
         </p14:section>
-        <p14:section name="Read-along" id="{d740a379-1115-e089-434b-b34d765a8e73}">
+        <p14:section name="Read-along" id="{4900f9f4-a0fa-fe80-46ea-7ea9de8e24c4}">
           <p14:sldIdLst>
             <p14:sldId id="261"/>
             <p14:sldId id="262"/>
           </p14:sldIdLst>
         </p14:section>
-        <p14:section name="Teach" id="{b31a47f6-e39a-fa13-3d60-f4781319264e}">
+        <p14:section name="Teach" id="{ffc00fff-8fd1-c74c-15f0-fe0894e037ff}">
           <p14:sldIdLst>
             <p14:sldId id="263"/>
             <p14:sldId id="264"/>
@@ -158,7 +158,7 @@
             <p14:sldId id="267"/>
           </p14:sldIdLst>
         </p14:section>
-        <p14:section name="Routes" id="{6d86e2c1-69ae-9892-5b20-602d98db22c8}">
+        <p14:section name="Routes" id="{2de09439-ca24-0986-ca8e-9edfd7a6c440}">
           <p14:sldIdLst>
             <p14:sldId id="268"/>
             <p14:sldId id="269"/>
@@ -166,12 +166,12 @@
             <p14:sldId id="271"/>
           </p14:sldIdLst>
         </p14:section>
-        <p14:section name="Close" id="{d03756ab-0580-9f97-1085-baa2aa9c99b6}">
+        <p14:section name="Close" id="{40576a5a-cb7c-dc8d-99fe-421aa6788b5a}">
           <p14:sldIdLst>
             <p14:sldId id="272"/>
           </p14:sldIdLst>
         </p14:section>
-        <p14:section name="Answers" id="{8428a4da-7dbe-23c8-f2ff-fe9c47a61301}">
+        <p14:section name="Answers" id="{360e6cf7-da73-68d0-ce48-9f5ccd4c1935}">
           <p14:sldIdLst>
             <p14:sldId id="273"/>
             <p14:sldId id="274"/>
